--- a/public/fun/pack/pptx/weddingpro/결혼식프리미엄_22_러브스토리중심_네온아쿠아.pptx
+++ b/public/fun/pack/pptx/weddingpro/결혼식프리미엄_22_러브스토리중심_네온아쿠아.pptx
@@ -113,12 +113,12 @@
   <p:extLst>
     <p:ext uri="{521415D9-36F7-43E2-AB2F-B90AF26B5E84}">
       <p14:sectionLst xmlns:p14="http://schemas.microsoft.com/office/powerpoint/2010/main">
-        <p14:section name="시작" id="{4DCE7C88-D4F0-4484-8E6E-9F794866B6B5}">
+        <p14:section name="시작" id="{51DB6A8E-CE5B-4D8F-BB34-AE5B6F4935DB}">
           <p14:sldIdLst>
             <p14:sldId id="256"/>
           </p14:sldIdLst>
         </p14:section>
-        <p14:section name="본문" id="{C766164B-7951-4211-B6D1-7B814F831562}">
+        <p14:section name="본문" id="{F1D1480C-5E7B-4E01-B9C9-750A36029F4E}">
           <p14:sldIdLst>
             <p14:sldId id="257"/>
             <p14:sldId id="258"/>
@@ -127,7 +127,7 @@
             <p14:sldId id="261"/>
           </p14:sldIdLst>
         </p14:section>
-        <p14:section name="마무리" id="{749B48D9-3029-4B7B-93D7-D51F233781D3}">
+        <p14:section name="마무리" id="{046BAA71-09D5-4EEC-B9F7-729E6156110C}">
           <p14:sldIdLst>
             <p14:sldId id="262"/>
           </p14:sldIdLst>
@@ -1517,7 +1517,7 @@
             </a:lvl1pPr>
           </a:lstStyle>
           <a:p>
-            <a:fld id="{8A98F04C-2136-476F-A499-C5DAC7FCCC92}" type="slidenum">
+            <a:fld id="{B0EE08AD-92E6-4DC4-B430-ED639A4DB504}" type="slidenum">
               <a:rPr lang="en-US"/>
               <a:t>‹#›</a:t>
             </a:fld>
@@ -2806,7 +2806,7 @@
             </a:lvl1pPr>
           </a:lstStyle>
           <a:p>
-            <a:fld id="{BA75C9D6-D00B-40E9-8CD9-665BDD0E37C2}" type="slidenum">
+            <a:fld id="{0BB11513-21BC-405E-86B0-22C6D2AB2920}" type="slidenum">
               <a:rPr lang="en-US"/>
               <a:t>‹#›</a:t>
             </a:fld>
@@ -4096,7 +4096,7 @@
             </a:lvl1pPr>
           </a:lstStyle>
           <a:p>
-            <a:fld id="{4ECB245E-895E-4289-A56D-4AF7E1400D20}" type="slidenum">
+            <a:fld id="{B0E0B122-D016-4828-ACA5-CFD09002D05F}" type="slidenum">
               <a:rPr lang="en-US"/>
               <a:t>‹#›</a:t>
             </a:fld>
@@ -5599,7 +5599,7 @@
           <a:p>
             <a:r>
               <a:rPr lang="ko-KR"/>
-              <a:t>같이 떠난 첫 여름 여행이 시작이었습니다</a:t>
+              <a:t>같이 떠난 첫 여행이 시작이었습니다</a:t>
             </a:r>
           </a:p>
         </p:txBody>
@@ -5627,7 +5627,7 @@
           <a:p>
             <a:r>
               <a:rPr lang="ko-KR"/>
-              <a:t>0000. 00. 00 · 예식장 이름</a:t>
+              <a:t>날짜 입력 · 예식장 이름</a:t>
             </a:r>
           </a:p>
         </p:txBody>
@@ -5860,7 +5860,7 @@
           <a:bodyPr/>
           <a:lstStyle/>
           <a:p>
-            <a:fld id="{81078700-DC8E-487F-A6EF-BD84B0EF9341}" type="slidenum">
+            <a:fld id="{B8B027A4-E86F-4072-AE19-BF2300FC522D}" type="slidenum">
               <a:rPr lang="en-US"/>
               <a:t>‹#›</a:t>
             </a:fld>
@@ -6260,7 +6260,7 @@
           <a:bodyPr/>
           <a:lstStyle/>
           <a:p>
-            <a:fld id="{4F2A9C7A-E43A-4766-8F3D-0F814AAAAC64}" type="slidenum">
+            <a:fld id="{02E41426-0E4C-473E-9D9E-5F8B195DB079}" type="slidenum">
               <a:rPr lang="en-US"/>
               <a:t>‹#›</a:t>
             </a:fld>
@@ -7235,7 +7235,7 @@
           <a:bodyPr/>
           <a:lstStyle/>
           <a:p>
-            <a:fld id="{6CD9D595-2248-4E96-8172-8A62E956EA6E}" type="slidenum">
+            <a:fld id="{1E76E7B9-58B4-4A2E-A46C-5D29DF2BFD81}" type="slidenum">
               <a:rPr lang="en-US"/>
               <a:t>‹#›</a:t>
             </a:fld>
@@ -8727,7 +8727,7 @@
           <a:bodyPr/>
           <a:lstStyle/>
           <a:p>
-            <a:fld id="{0CC04852-6182-4AE4-ADD3-38E02404EB74}" type="slidenum">
+            <a:fld id="{B2185021-4A4B-4DA1-9223-BF3185E00F45}" type="slidenum">
               <a:rPr lang="en-US"/>
               <a:t>‹#›</a:t>
             </a:fld>
@@ -8815,7 +8815,7 @@
           <a:bodyPr/>
           <a:lstStyle/>
           <a:p>
-            <a:fld id="{85827028-FECC-418D-A8BC-500CEB218C26}" type="slidenum">
+            <a:fld id="{63BF7BA0-91B8-4DB1-82E1-8876EB395AA2}" type="slidenum">
               <a:rPr lang="en-US"/>
               <a:t>‹#›</a:t>
             </a:fld>
